--- a/share/SIH26-A0H-T037-SIH26167_Presentation.pptx
+++ b/share/SIH26-A0H-T037-SIH26167_Presentation.pptx
@@ -890,7 +890,7 @@
           <a:p>
             <a:fld id="{E60792E3-D524-454C-8AFD-A91972900BCB}" type="datetime1">
               <a:rPr lang="en-US" smtClean="0"/>
-              <a:t>30-Aug-26</a:t>
+              <a:t>05-Sep-26</a:t>
             </a:fld>
             <a:endParaRPr lang="en-US"/>
           </a:p>
@@ -2181,8 +2181,8 @@
         </p:nvSpPr>
         <p:spPr>
           <a:xfrm>
-            <a:off x="262275" y="1454103"/>
-            <a:ext cx="5924550" cy="4801314"/>
+            <a:off x="262275" y="1084771"/>
+            <a:ext cx="5924550" cy="5539978"/>
           </a:xfrm>
           <a:prstGeom prst="rect">
             <a:avLst/>
@@ -2310,6 +2310,33 @@
                 <a:cs typeface="Times New Roman" panose="02020603050405020304" pitchFamily="18" charset="0"/>
               </a:rPr>
               <a:t>Software</a:t>
+            </a:r>
+          </a:p>
+          <a:p>
+            <a:pPr algn="just"/>
+            <a:endParaRPr lang="en-US" sz="2400" dirty="0">
+              <a:latin typeface="Times New Roman" panose="02020603050405020304" pitchFamily="18" charset="0"/>
+              <a:cs typeface="Times New Roman" panose="02020603050405020304" pitchFamily="18" charset="0"/>
+            </a:endParaRPr>
+          </a:p>
+          <a:p>
+            <a:pPr marL="285750" indent="-285750" algn="just">
+              <a:buFont typeface="Arial" panose="020B0604020202020204" pitchFamily="34" charset="0"/>
+              <a:buChar char="•"/>
+            </a:pPr>
+            <a:r>
+              <a:rPr lang="en-US" sz="2400" b="1" dirty="0">
+                <a:latin typeface="Times New Roman" panose="02020603050405020304" pitchFamily="18" charset="0"/>
+                <a:cs typeface="Times New Roman" panose="02020603050405020304" pitchFamily="18" charset="0"/>
+              </a:rPr>
+              <a:t>Team ID : </a:t>
+            </a:r>
+            <a:r>
+              <a:rPr lang="en-US" sz="2400" dirty="0">
+                <a:latin typeface="Times New Roman" panose="02020603050405020304" pitchFamily="18" charset="0"/>
+                <a:cs typeface="Times New Roman" panose="02020603050405020304" pitchFamily="18" charset="0"/>
+              </a:rPr>
+              <a:t>SIH26-A0H-T037</a:t>
             </a:r>
           </a:p>
           <a:p>
